--- a/Day1_Probability/FW536_Day1_Morning_intro to probability.pptx
+++ b/Day1_Probability/FW536_Day1_Morning_intro to probability.pptx
@@ -7179,7 +7179,7 @@
                 <a:ea typeface="Arial" charset="0"/>
                 <a:cs typeface="Arial" charset="0"/>
               </a:rPr>
-              <a:t>FW599 - Fall 2025</a:t>
+              <a:t>FW 536 · 2026</a:t>
             </a:r>
             <a:br>
               <a:rPr lang="en-US" altLang="en-US" sz="4000" b="1" dirty="0">
@@ -37563,7 +37563,7 @@
                 <a:ea typeface="Arial" charset="0"/>
                 <a:cs typeface="Arial" charset="0"/>
               </a:rPr>
-              <a:t>Participation and group work (100 points)</a:t>
+              <a:t>Pre-course exam (50 points, scored generously)</a:t>
             </a:r>
           </a:p>
           <a:p>
@@ -37578,7 +37578,7 @@
                 <a:latin typeface="Arial" charset="0"/>
                 <a:cs typeface="Arial" charset="0"/>
               </a:rPr>
-              <a:t>Labs (200 points)</a:t>
+              <a:t>Nine problem sets, one per session (20 points each, 180 points)</a:t>
             </a:r>
             <a:endParaRPr lang="en-AU" altLang="en-US" sz="3200" kern="0" dirty="0">
               <a:solidFill>
